--- a/iColorPlus_AR_TryOn_Summary.pptx
+++ b/iColorPlus_AR_TryOn_Summary.pptx
@@ -3339,7 +3339,7 @@
                 </a:solidFill>
                 <a:latin typeface="Calibri"/>
               </a:rPr>
-              <a:t>Virtual Try-On Mirror &amp; Web Experience  ·  Mineski Global (Philippines) for iColor Plus — Great Lengths</a:t>
+              <a:t>Virtual Try-On Mirror &amp; Web Experience  ·  Conrad for iColor Plus — Great Lengths</a:t>
             </a:r>
           </a:p>
         </p:txBody>
